--- a/assets/presentation.pptx
+++ b/assets/presentation.pptx
@@ -152,6 +152,35 @@
     </p:ext>
   </p:extLst>
 </p:presentation>
+</file>
+
+<file path=ppt/changesInfos/changesInfo1.xml><?xml version="1.0" encoding="utf-8"?>
+<pc:chgInfo xmlns:a="http://schemas.openxmlformats.org/drawingml/2006/main" xmlns:r="http://schemas.openxmlformats.org/officeDocument/2006/relationships" xmlns:ac="http://schemas.microsoft.com/office/drawing/2013/main/command" xmlns:pc="http://schemas.microsoft.com/office/powerpoint/2013/main/command">
+  <pc:docChgLst>
+    <pc:chgData name="Mikula Pavel" userId="d9301610-42c3-4922-8e2c-37bc5d809dca" providerId="ADAL" clId="{A91997AB-EA76-46AC-9F25-1226726C6B12}"/>
+    <pc:docChg chg="modSld">
+      <pc:chgData name="Mikula Pavel" userId="d9301610-42c3-4922-8e2c-37bc5d809dca" providerId="ADAL" clId="{A91997AB-EA76-46AC-9F25-1226726C6B12}" dt="2025-05-11T22:17:08.248" v="0" actId="14826"/>
+      <pc:docMkLst>
+        <pc:docMk/>
+      </pc:docMkLst>
+      <pc:sldChg chg="modSp mod">
+        <pc:chgData name="Mikula Pavel" userId="d9301610-42c3-4922-8e2c-37bc5d809dca" providerId="ADAL" clId="{A91997AB-EA76-46AC-9F25-1226726C6B12}" dt="2025-05-11T22:17:08.248" v="0" actId="14826"/>
+        <pc:sldMkLst>
+          <pc:docMk/>
+          <pc:sldMk cId="2837171638" sldId="297"/>
+        </pc:sldMkLst>
+        <pc:picChg chg="mod">
+          <ac:chgData name="Mikula Pavel" userId="d9301610-42c3-4922-8e2c-37bc5d809dca" providerId="ADAL" clId="{A91997AB-EA76-46AC-9F25-1226726C6B12}" dt="2025-05-11T22:17:08.248" v="0" actId="14826"/>
+          <ac:picMkLst>
+            <pc:docMk/>
+            <pc:sldMk cId="2837171638" sldId="297"/>
+            <ac:picMk id="10" creationId="{42A34BF4-A0F3-5465-2F98-7061E8BAA521}"/>
+          </ac:picMkLst>
+        </pc:picChg>
+      </pc:sldChg>
+    </pc:docChg>
+  </pc:docChgLst>
+</pc:chgInfo>
 </file>
 
 <file path=ppt/diagrams/colors1.xml><?xml version="1.0" encoding="utf-8"?>
@@ -3425,7 +3454,7 @@
             <a:pPr algn="r" rtl="0"/>
             <a:fld id="{D92DAF1D-8F38-49AC-B404-1337A10650DD}" type="datetime1">
               <a:rPr lang="cs-CZ" smtClean="0"/>
-              <a:t>11.05.2025</a:t>
+              <a:t>12.05.2025</a:t>
             </a:fld>
             <a:endParaRPr lang="cs-CZ" dirty="0"/>
           </a:p>
@@ -3595,7 +3624,7 @@
             <a:fld id="{2084BE0D-C9E9-4F18-B817-2DBEF890598A}" type="datetime1">
               <a:rPr lang="cs-CZ" smtClean="0"/>
               <a:pPr/>
-              <a:t>11.05.2025</a:t>
+              <a:t>12.05.2025</a:t>
             </a:fld>
             <a:endParaRPr lang="cs-CZ" dirty="0"/>
           </a:p>
@@ -5608,7 +5637,7 @@
           <a:p>
             <a:fld id="{7D0C72C7-7C23-471B-84C3-F62DB4DAEA86}" type="datetime1">
               <a:rPr lang="cs-CZ" smtClean="0"/>
-              <a:t>11.05.2025</a:t>
+              <a:t>12.05.2025</a:t>
             </a:fld>
             <a:endParaRPr lang="cs-CZ" dirty="0"/>
           </a:p>
@@ -5816,7 +5845,7 @@
           <a:p>
             <a:fld id="{1C5161E4-BEFE-4EC0-9044-752344055020}" type="datetime1">
               <a:rPr lang="cs-CZ" smtClean="0"/>
-              <a:t>11.05.2025</a:t>
+              <a:t>12.05.2025</a:t>
             </a:fld>
             <a:endParaRPr lang="cs-CZ" dirty="0"/>
           </a:p>
@@ -6034,7 +6063,7 @@
           <a:p>
             <a:fld id="{D5389C03-22AF-4514-8013-5326635F7824}" type="datetime1">
               <a:rPr lang="cs-CZ" smtClean="0"/>
-              <a:t>11.05.2025</a:t>
+              <a:t>12.05.2025</a:t>
             </a:fld>
             <a:endParaRPr lang="cs-CZ" dirty="0"/>
           </a:p>
@@ -6242,7 +6271,7 @@
           <a:p>
             <a:fld id="{097FAED7-EA56-430A-A59A-1F0DD1E104F4}" type="datetime1">
               <a:rPr lang="cs-CZ" smtClean="0"/>
-              <a:t>11.05.2025</a:t>
+              <a:t>12.05.2025</a:t>
             </a:fld>
             <a:endParaRPr lang="cs-CZ" dirty="0"/>
           </a:p>
@@ -6681,7 +6710,7 @@
           <a:p>
             <a:fld id="{FB988F1E-1E80-404D-8631-D52C3E554537}" type="datetime1">
               <a:rPr lang="cs-CZ" smtClean="0"/>
-              <a:t>11.05.2025</a:t>
+              <a:t>12.05.2025</a:t>
             </a:fld>
             <a:endParaRPr lang="cs-CZ" dirty="0"/>
           </a:p>
@@ -6994,7 +7023,7 @@
           <a:p>
             <a:fld id="{DE3E14AA-B127-42F2-84D1-3C828C6D36A1}" type="datetime1">
               <a:rPr lang="cs-CZ" smtClean="0"/>
-              <a:t>11.05.2025</a:t>
+              <a:t>12.05.2025</a:t>
             </a:fld>
             <a:endParaRPr lang="cs-CZ" dirty="0"/>
           </a:p>
@@ -7455,7 +7484,7 @@
           <a:p>
             <a:fld id="{39468266-5084-46B1-AE7D-3FD2BD2B9911}" type="datetime1">
               <a:rPr lang="cs-CZ" smtClean="0"/>
-              <a:t>11.05.2025</a:t>
+              <a:t>12.05.2025</a:t>
             </a:fld>
             <a:endParaRPr lang="cs-CZ" dirty="0"/>
           </a:p>
@@ -7596,7 +7625,7 @@
           <a:p>
             <a:fld id="{DBB8BAEF-331C-4937-B468-67D4BE96C70C}" type="datetime1">
               <a:rPr lang="cs-CZ" smtClean="0"/>
-              <a:t>11.05.2025</a:t>
+              <a:t>12.05.2025</a:t>
             </a:fld>
             <a:endParaRPr lang="cs-CZ" dirty="0"/>
           </a:p>
@@ -7709,7 +7738,7 @@
           <a:p>
             <a:fld id="{8CE0C758-0F74-4BF6-8998-29FE5E523F6A}" type="datetime1">
               <a:rPr lang="cs-CZ" smtClean="0"/>
-              <a:t>11.05.2025</a:t>
+              <a:t>12.05.2025</a:t>
             </a:fld>
             <a:endParaRPr lang="cs-CZ" dirty="0"/>
           </a:p>
@@ -8014,7 +8043,7 @@
           <a:p>
             <a:fld id="{71A2F16C-6E19-48D9-BEAA-BA11174FDB33}" type="datetime1">
               <a:rPr lang="cs-CZ" smtClean="0"/>
-              <a:t>11.05.2025</a:t>
+              <a:t>12.05.2025</a:t>
             </a:fld>
             <a:endParaRPr lang="cs-CZ" dirty="0"/>
           </a:p>
@@ -8310,7 +8339,7 @@
           <a:p>
             <a:fld id="{D82A1F31-67F5-42F9-88C7-BE179E3C0FA6}" type="datetime1">
               <a:rPr lang="cs-CZ" smtClean="0"/>
-              <a:t>11.05.2025</a:t>
+              <a:t>12.05.2025</a:t>
             </a:fld>
             <a:endParaRPr lang="cs-CZ" dirty="0"/>
           </a:p>
@@ -8910,7 +8939,7 @@
           <a:p>
             <a:fld id="{8FBF7077-770E-4F27-82B0-D7D15FD70F0E}" type="datetime1">
               <a:rPr lang="cs-CZ" smtClean="0"/>
-              <a:t>11.05.2025</a:t>
+              <a:t>12.05.2025</a:t>
             </a:fld>
             <a:endParaRPr lang="cs-CZ" dirty="0"/>
           </a:p>
@@ -9405,7 +9434,7 @@
           <a:p>
             <a:fld id="{378687E4-9550-45CC-B940-1BAB84318B88}" type="datetime1">
               <a:rPr lang="cs-CZ" smtClean="0"/>
-              <a:t>11.05.2025</a:t>
+              <a:t>12.05.2025</a:t>
             </a:fld>
             <a:endParaRPr lang="cs-CZ"/>
           </a:p>
@@ -9579,7 +9608,7 @@
                   <a:schemeClr val="bg1"/>
                 </a:solidFill>
               </a:rPr>
-              <a:t>11.05.2025</a:t>
+              <a:t>12.05.2025</a:t>
             </a:fld>
             <a:endParaRPr lang="cs-CZ" dirty="0">
               <a:solidFill>
@@ -9821,7 +9850,7 @@
                   <a:schemeClr val="bg1"/>
                 </a:solidFill>
               </a:rPr>
-              <a:t>11.05.2025</a:t>
+              <a:t>12.05.2025</a:t>
             </a:fld>
             <a:endParaRPr lang="cs-CZ" dirty="0">
               <a:solidFill>
@@ -10308,7 +10337,7 @@
                   <a:schemeClr val="tx1"/>
                 </a:solidFill>
               </a:rPr>
-              <a:t>11.05.2025</a:t>
+              <a:t>12.05.2025</a:t>
             </a:fld>
             <a:endParaRPr lang="cs-CZ" dirty="0">
               <a:solidFill>
@@ -10826,7 +10855,7 @@
                   </a:schemeClr>
                 </a:solidFill>
               </a:rPr>
-              <a:t>11.05.2025</a:t>
+              <a:t>12.05.2025</a:t>
             </a:fld>
             <a:endParaRPr lang="cs-CZ" dirty="0">
               <a:solidFill>
@@ -11145,7 +11174,7 @@
                   </a:schemeClr>
                 </a:solidFill>
               </a:rPr>
-              <a:t>11.05.2025</a:t>
+              <a:t>12.05.2025</a:t>
             </a:fld>
             <a:endParaRPr lang="cs-CZ" dirty="0">
               <a:solidFill>
@@ -11356,7 +11385,7 @@
                   <a:schemeClr val="bg1"/>
                 </a:solidFill>
               </a:rPr>
-              <a:t>11.05.2025</a:t>
+              <a:t>12.05.2025</a:t>
             </a:fld>
             <a:endParaRPr lang="cs-CZ" dirty="0">
               <a:solidFill>
@@ -11972,7 +12001,7 @@
                   <a:schemeClr val="bg1"/>
                 </a:solidFill>
               </a:rPr>
-              <a:t>11.05.2025</a:t>
+              <a:t>12.05.2025</a:t>
             </a:fld>
             <a:endParaRPr lang="cs-CZ" dirty="0">
               <a:solidFill>
@@ -12456,7 +12485,7 @@
                   <a:schemeClr val="bg1"/>
                 </a:solidFill>
               </a:rPr>
-              <a:t>11.05.2025</a:t>
+              <a:t>12.05.2025</a:t>
             </a:fld>
             <a:endParaRPr lang="cs-CZ" dirty="0">
               <a:solidFill>
@@ -13450,15 +13479,20 @@
           <p:nvPr/>
         </p:nvPicPr>
         <p:blipFill>
-          <a:blip r:embed="rId3"/>
-          <a:stretch>
-            <a:fillRect/>
-          </a:stretch>
+          <a:blip r:embed="rId3">
+            <a:extLst>
+              <a:ext uri="{28A0092B-C50C-407E-A947-70E740481C1C}">
+                <a14:useLocalDpi xmlns:a14="http://schemas.microsoft.com/office/drawing/2010/main" val="0"/>
+              </a:ext>
+            </a:extLst>
+          </a:blip>
+          <a:srcRect/>
+          <a:stretch/>
         </p:blipFill>
         <p:spPr>
           <a:xfrm>
-            <a:off x="5374332" y="108271"/>
-            <a:ext cx="6625569" cy="6641458"/>
+            <a:off x="5374332" y="124217"/>
+            <a:ext cx="6625569" cy="6609565"/>
           </a:xfrm>
           <a:prstGeom prst="rect">
             <a:avLst/>
@@ -14928,151 +14962,6 @@
 </file>
 
 <file path=customXml/item1.xml><?xml version="1.0" encoding="utf-8"?>
-<p:properties xmlns:p="http://schemas.microsoft.com/office/2006/metadata/properties" xmlns:xsi="http://www.w3.org/2001/XMLSchema-instance" xmlns:pc="http://schemas.microsoft.com/office/infopath/2007/PartnerControls">
-  <documentManagement>
-    <LocPublishedLinkedAssetsLookup xmlns="4873beb7-5857-4685-be1f-d57550cc96cc" xsi:nil="true"/>
-    <ApprovalStatus xmlns="4873beb7-5857-4685-be1f-d57550cc96cc">InProgress</ApprovalStatus>
-    <MarketSpecific xmlns="4873beb7-5857-4685-be1f-d57550cc96cc">false</MarketSpecific>
-    <LocComments xmlns="4873beb7-5857-4685-be1f-d57550cc96cc" xsi:nil="true"/>
-    <LocLastLocAttemptVersionTypeLookup xmlns="4873beb7-5857-4685-be1f-d57550cc96cc" xsi:nil="true"/>
-    <DirectSourceMarket xmlns="4873beb7-5857-4685-be1f-d57550cc96cc" xsi:nil="true"/>
-    <ThumbnailAssetId xmlns="4873beb7-5857-4685-be1f-d57550cc96cc" xsi:nil="true"/>
-    <PrimaryImageGen xmlns="4873beb7-5857-4685-be1f-d57550cc96cc">false</PrimaryImageGen>
-    <LocNewPublishedVersionLookup xmlns="4873beb7-5857-4685-be1f-d57550cc96cc" xsi:nil="true"/>
-    <LegacyData xmlns="4873beb7-5857-4685-be1f-d57550cc96cc" xsi:nil="true"/>
-    <LocRecommendedHandoff xmlns="4873beb7-5857-4685-be1f-d57550cc96cc" xsi:nil="true"/>
-    <BusinessGroup xmlns="4873beb7-5857-4685-be1f-d57550cc96cc" xsi:nil="true"/>
-    <BlockPublish xmlns="4873beb7-5857-4685-be1f-d57550cc96cc">false</BlockPublish>
-    <TPFriendlyName xmlns="4873beb7-5857-4685-be1f-d57550cc96cc" xsi:nil="true"/>
-    <LocOverallPublishStatusLookup xmlns="4873beb7-5857-4685-be1f-d57550cc96cc" xsi:nil="true"/>
-    <NumericId xmlns="4873beb7-5857-4685-be1f-d57550cc96cc" xsi:nil="true"/>
-    <APEditor xmlns="4873beb7-5857-4685-be1f-d57550cc96cc">
-      <UserInfo>
-        <DisplayName/>
-        <AccountId xsi:nil="true"/>
-        <AccountType/>
-      </UserInfo>
-    </APEditor>
-    <SourceTitle xmlns="4873beb7-5857-4685-be1f-d57550cc96cc" xsi:nil="true"/>
-    <OpenTemplate xmlns="4873beb7-5857-4685-be1f-d57550cc96cc">true</OpenTemplate>
-    <LocOverallLocStatusLookup xmlns="4873beb7-5857-4685-be1f-d57550cc96cc" xsi:nil="true"/>
-    <UALocComments xmlns="4873beb7-5857-4685-be1f-d57550cc96cc" xsi:nil="true"/>
-    <ParentAssetId xmlns="4873beb7-5857-4685-be1f-d57550cc96cc" xsi:nil="true"/>
-    <IntlLangReviewDate xmlns="4873beb7-5857-4685-be1f-d57550cc96cc" xsi:nil="true"/>
-    <FeatureTagsTaxHTField0 xmlns="4873beb7-5857-4685-be1f-d57550cc96cc">
-      <Terms xmlns="http://schemas.microsoft.com/office/infopath/2007/PartnerControls"/>
-    </FeatureTagsTaxHTField0>
-    <PublishStatusLookup xmlns="4873beb7-5857-4685-be1f-d57550cc96cc">
-      <Value>1345093</Value>
-    </PublishStatusLookup>
-    <Providers xmlns="4873beb7-5857-4685-be1f-d57550cc96cc" xsi:nil="true"/>
-    <MachineTranslated xmlns="4873beb7-5857-4685-be1f-d57550cc96cc">false</MachineTranslated>
-    <OriginalSourceMarket xmlns="4873beb7-5857-4685-be1f-d57550cc96cc" xsi:nil="true"/>
-    <APDescription xmlns="4873beb7-5857-4685-be1f-d57550cc96cc">This simple template design works for technology and  businesses, but it's versatile enough to use in other contexts.  It features multiple slide layouts designed for widescreen (16x9 resolution) and includes a sample SmartArt list and chart that are easily editable.</APDescription>
-    <ClipArtFilename xmlns="4873beb7-5857-4685-be1f-d57550cc96cc" xsi:nil="true"/>
-    <ContentItem xmlns="4873beb7-5857-4685-be1f-d57550cc96cc" xsi:nil="true"/>
-    <TPInstallLocation xmlns="4873beb7-5857-4685-be1f-d57550cc96cc" xsi:nil="true"/>
-    <PublishTargets xmlns="4873beb7-5857-4685-be1f-d57550cc96cc">OfficeOnlineVNext</PublishTargets>
-    <TimesCloned xmlns="4873beb7-5857-4685-be1f-d57550cc96cc" xsi:nil="true"/>
-    <AssetStart xmlns="4873beb7-5857-4685-be1f-d57550cc96cc">2011-11-26T00:30:00+00:00</AssetStart>
-    <Provider xmlns="4873beb7-5857-4685-be1f-d57550cc96cc" xsi:nil="true"/>
-    <AcquiredFrom xmlns="4873beb7-5857-4685-be1f-d57550cc96cc">Internal MS</AcquiredFrom>
-    <FriendlyTitle xmlns="4873beb7-5857-4685-be1f-d57550cc96cc" xsi:nil="true"/>
-    <LastHandOff xmlns="4873beb7-5857-4685-be1f-d57550cc96cc" xsi:nil="true"/>
-    <TPClientViewer xmlns="4873beb7-5857-4685-be1f-d57550cc96cc" xsi:nil="true"/>
-    <TemplateStatus xmlns="4873beb7-5857-4685-be1f-d57550cc96cc">Complete</TemplateStatus>
-    <Downloads xmlns="4873beb7-5857-4685-be1f-d57550cc96cc">0</Downloads>
-    <OOCacheId xmlns="4873beb7-5857-4685-be1f-d57550cc96cc" xsi:nil="true"/>
-    <IsDeleted xmlns="4873beb7-5857-4685-be1f-d57550cc96cc">false</IsDeleted>
-    <LocPublishedDependentAssetsLookup xmlns="4873beb7-5857-4685-be1f-d57550cc96cc" xsi:nil="true"/>
-    <TPExecutable xmlns="4873beb7-5857-4685-be1f-d57550cc96cc" xsi:nil="true"/>
-    <EditorialTags xmlns="4873beb7-5857-4685-be1f-d57550cc96cc" xsi:nil="true"/>
-    <SubmitterId xmlns="4873beb7-5857-4685-be1f-d57550cc96cc" xsi:nil="true"/>
-    <ApprovalLog xmlns="4873beb7-5857-4685-be1f-d57550cc96cc" xsi:nil="true"/>
-    <AssetType xmlns="4873beb7-5857-4685-be1f-d57550cc96cc">TP</AssetType>
-    <BugNumber xmlns="4873beb7-5857-4685-be1f-d57550cc96cc" xsi:nil="true"/>
-    <CSXSubmissionDate xmlns="4873beb7-5857-4685-be1f-d57550cc96cc" xsi:nil="true"/>
-    <CSXUpdate xmlns="4873beb7-5857-4685-be1f-d57550cc96cc">false</CSXUpdate>
-    <Milestone xmlns="4873beb7-5857-4685-be1f-d57550cc96cc" xsi:nil="true"/>
-    <RecommendationsModifier xmlns="4873beb7-5857-4685-be1f-d57550cc96cc" xsi:nil="true"/>
-    <OriginAsset xmlns="4873beb7-5857-4685-be1f-d57550cc96cc" xsi:nil="true"/>
-    <TPComponent xmlns="4873beb7-5857-4685-be1f-d57550cc96cc" xsi:nil="true"/>
-    <AssetId xmlns="4873beb7-5857-4685-be1f-d57550cc96cc">TP102787989</AssetId>
-    <IntlLocPriority xmlns="4873beb7-5857-4685-be1f-d57550cc96cc" xsi:nil="true"/>
-    <PolicheckWords xmlns="4873beb7-5857-4685-be1f-d57550cc96cc" xsi:nil="true"/>
-    <TPLaunchHelpLink xmlns="4873beb7-5857-4685-be1f-d57550cc96cc" xsi:nil="true"/>
-    <TPApplication xmlns="4873beb7-5857-4685-be1f-d57550cc96cc" xsi:nil="true"/>
-    <CrawlForDependencies xmlns="4873beb7-5857-4685-be1f-d57550cc96cc">false</CrawlForDependencies>
-    <HandoffToMSDN xmlns="4873beb7-5857-4685-be1f-d57550cc96cc" xsi:nil="true"/>
-    <PlannedPubDate xmlns="4873beb7-5857-4685-be1f-d57550cc96cc" xsi:nil="true"/>
-    <IntlLangReviewer xmlns="4873beb7-5857-4685-be1f-d57550cc96cc" xsi:nil="true"/>
-    <TrustLevel xmlns="4873beb7-5857-4685-be1f-d57550cc96cc">1 Microsoft Managed Content</TrustLevel>
-    <LocLastLocAttemptVersionLookup xmlns="4873beb7-5857-4685-be1f-d57550cc96cc">694266</LocLastLocAttemptVersionLookup>
-    <LocProcessedForHandoffsLookup xmlns="4873beb7-5857-4685-be1f-d57550cc96cc" xsi:nil="true"/>
-    <IsSearchable xmlns="4873beb7-5857-4685-be1f-d57550cc96cc">true</IsSearchable>
-    <TemplateTemplateType xmlns="4873beb7-5857-4685-be1f-d57550cc96cc">PowerPoint Presentation Template</TemplateTemplateType>
-    <CampaignTagsTaxHTField0 xmlns="4873beb7-5857-4685-be1f-d57550cc96cc">
-      <Terms xmlns="http://schemas.microsoft.com/office/infopath/2007/PartnerControls"/>
-    </CampaignTagsTaxHTField0>
-    <TPNamespace xmlns="4873beb7-5857-4685-be1f-d57550cc96cc" xsi:nil="true"/>
-    <LocOverallPreviewStatusLookup xmlns="4873beb7-5857-4685-be1f-d57550cc96cc" xsi:nil="true"/>
-    <TaxCatchAll xmlns="4873beb7-5857-4685-be1f-d57550cc96cc"/>
-    <Markets xmlns="4873beb7-5857-4685-be1f-d57550cc96cc"/>
-    <UAProjectedTotalWords xmlns="4873beb7-5857-4685-be1f-d57550cc96cc" xsi:nil="true"/>
-    <IntlLangReview xmlns="4873beb7-5857-4685-be1f-d57550cc96cc" xsi:nil="true"/>
-    <OutputCachingOn xmlns="4873beb7-5857-4685-be1f-d57550cc96cc">false</OutputCachingOn>
-    <AverageRating xmlns="4873beb7-5857-4685-be1f-d57550cc96cc" xsi:nil="true"/>
-    <APAuthor xmlns="4873beb7-5857-4685-be1f-d57550cc96cc">
-      <UserInfo>
-        <DisplayName>REDMOND\kristaa</DisplayName>
-        <AccountId>136</AccountId>
-        <AccountType/>
-      </UserInfo>
-    </APAuthor>
-    <LocManualTestRequired xmlns="4873beb7-5857-4685-be1f-d57550cc96cc">false</LocManualTestRequired>
-    <TPCommandLine xmlns="4873beb7-5857-4685-be1f-d57550cc96cc" xsi:nil="true"/>
-    <TPAppVersion xmlns="4873beb7-5857-4685-be1f-d57550cc96cc" xsi:nil="true"/>
-    <EditorialStatus xmlns="4873beb7-5857-4685-be1f-d57550cc96cc">Complete</EditorialStatus>
-    <LastModifiedDateTime xmlns="4873beb7-5857-4685-be1f-d57550cc96cc" xsi:nil="true"/>
-    <ScenarioTagsTaxHTField0 xmlns="4873beb7-5857-4685-be1f-d57550cc96cc">
-      <Terms xmlns="http://schemas.microsoft.com/office/infopath/2007/PartnerControls"/>
-    </ScenarioTagsTaxHTField0>
-    <LocProcessedForMarketsLookup xmlns="4873beb7-5857-4685-be1f-d57550cc96cc" xsi:nil="true"/>
-    <TPLaunchHelpLinkType xmlns="4873beb7-5857-4685-be1f-d57550cc96cc">Template</TPLaunchHelpLinkType>
-    <OriginalRelease xmlns="4873beb7-5857-4685-be1f-d57550cc96cc">15</OriginalRelease>
-    <LocalizationTagsTaxHTField0 xmlns="4873beb7-5857-4685-be1f-d57550cc96cc">
-      <Terms xmlns="http://schemas.microsoft.com/office/infopath/2007/PartnerControls"/>
-    </LocalizationTagsTaxHTField0>
-    <UACurrentWords xmlns="4873beb7-5857-4685-be1f-d57550cc96cc" xsi:nil="true"/>
-    <ArtSampleDocs xmlns="4873beb7-5857-4685-be1f-d57550cc96cc" xsi:nil="true"/>
-    <UALocRecommendation xmlns="4873beb7-5857-4685-be1f-d57550cc96cc">Localize</UALocRecommendation>
-    <Manager xmlns="4873beb7-5857-4685-be1f-d57550cc96cc" xsi:nil="true"/>
-    <LocOverallHandbackStatusLookup xmlns="4873beb7-5857-4685-be1f-d57550cc96cc" xsi:nil="true"/>
-    <ShowIn xmlns="4873beb7-5857-4685-be1f-d57550cc96cc">Show everywhere</ShowIn>
-    <UANotes xmlns="4873beb7-5857-4685-be1f-d57550cc96cc" xsi:nil="true"/>
-    <InternalTagsTaxHTField0 xmlns="4873beb7-5857-4685-be1f-d57550cc96cc">
-      <Terms xmlns="http://schemas.microsoft.com/office/infopath/2007/PartnerControls"/>
-    </InternalTagsTaxHTField0>
-    <CSXHash xmlns="4873beb7-5857-4685-be1f-d57550cc96cc" xsi:nil="true"/>
-    <VoteCount xmlns="4873beb7-5857-4685-be1f-d57550cc96cc" xsi:nil="true"/>
-    <AssetExpire xmlns="4873beb7-5857-4685-be1f-d57550cc96cc">2029-05-12T07:00:00+00:00</AssetExpire>
-    <DSATActionTaken xmlns="4873beb7-5857-4685-be1f-d57550cc96cc" xsi:nil="true"/>
-    <CSXSubmissionMarket xmlns="4873beb7-5857-4685-be1f-d57550cc96cc" xsi:nil="true"/>
-    <LocMarketGroupTiers2 xmlns="4873beb7-5857-4685-be1f-d57550cc96cc" xsi:nil="true"/>
-  </documentManagement>
-</p:properties>
-</file>
-
-<file path=customXml/item2.xml><?xml version="1.0" encoding="utf-8"?>
-<?mso-contentType ?>
-<FormTemplates xmlns="http://schemas.microsoft.com/sharepoint/v3/contenttype/forms">
-  <Display>DocumentLibraryForm</Display>
-  <Edit>AssetEditForm</Edit>
-  <New>DocumentLibraryForm</New>
-</FormTemplates>
-</file>
-
-<file path=customXml/item3.xml><?xml version="1.0" encoding="utf-8"?>
 <ct:contentTypeSchema xmlns:ct="http://schemas.microsoft.com/office/2006/metadata/contentType" xmlns:ma="http://schemas.microsoft.com/office/2006/metadata/properties/metaAttributes" ct:_="" ma:_="" ma:contentTypeName="TemplateFile" ma:contentTypeID="0x0101006EDDDB5EE6D98C44930B742096920B300400F5B6D36B3EF94B4E9A635CDF2A18F5B8" ma:contentTypeVersion="72" ma:contentTypeDescription="Create a new document." ma:contentTypeScope="" ma:versionID="a23e56308344d904b51738559c3d67c9">
   <xsd:schema xmlns:xsd="http://www.w3.org/2001/XMLSchema" xmlns:xs="http://www.w3.org/2001/XMLSchema" xmlns:p="http://schemas.microsoft.com/office/2006/metadata/properties" xmlns:ns2="4873beb7-5857-4685-be1f-d57550cc96cc" targetNamespace="http://schemas.microsoft.com/office/2006/metadata/properties" ma:root="true" ma:fieldsID="cd0908cc4600e77bf5da051303e00c8d" ns2:_="">
     <xsd:import namespace="4873beb7-5857-4685-be1f-d57550cc96cc"/>
@@ -16112,31 +16001,152 @@
 </ct:contentTypeSchema>
 </file>
 
-<file path=customXml/itemProps1.xml><?xml version="1.0" encoding="utf-8"?>
-<ds:datastoreItem xmlns:ds="http://schemas.openxmlformats.org/officeDocument/2006/customXml" ds:itemID="{60C67BEE-D13F-4BD2-98A5-34D8A0977F68}">
-  <ds:schemaRefs>
-    <ds:schemaRef ds:uri="4873beb7-5857-4685-be1f-d57550cc96cc"/>
-    <ds:schemaRef ds:uri="http://schemas.microsoft.com/office/2006/documentManagement/types"/>
-    <ds:schemaRef ds:uri="http://schemas.openxmlformats.org/package/2006/metadata/core-properties"/>
-    <ds:schemaRef ds:uri="http://purl.org/dc/elements/1.1/"/>
-    <ds:schemaRef ds:uri="http://purl.org/dc/dcmitype/"/>
-    <ds:schemaRef ds:uri="http://schemas.microsoft.com/office/2006/metadata/properties"/>
-    <ds:schemaRef ds:uri="http://schemas.microsoft.com/office/infopath/2007/PartnerControls"/>
-    <ds:schemaRef ds:uri="http://www.w3.org/XML/1998/namespace"/>
-    <ds:schemaRef ds:uri="http://purl.org/dc/terms/"/>
-  </ds:schemaRefs>
-</ds:datastoreItem>
+<file path=customXml/item2.xml><?xml version="1.0" encoding="utf-8"?>
+<?mso-contentType ?>
+<FormTemplates xmlns="http://schemas.microsoft.com/sharepoint/v3/contenttype/forms">
+  <Display>DocumentLibraryForm</Display>
+  <Edit>AssetEditForm</Edit>
+  <New>DocumentLibraryForm</New>
+</FormTemplates>
 </file>
 
-<file path=customXml/itemProps2.xml><?xml version="1.0" encoding="utf-8"?>
-<ds:datastoreItem xmlns:ds="http://schemas.openxmlformats.org/officeDocument/2006/customXml" ds:itemID="{3836F65B-1B07-41EE-A0E8-BC6EF3855225}">
-  <ds:schemaRefs>
-    <ds:schemaRef ds:uri="http://schemas.microsoft.com/sharepoint/v3/contenttype/forms"/>
-  </ds:schemaRefs>
-</ds:datastoreItem>
+<file path=customXml/item3.xml><?xml version="1.0" encoding="utf-8"?>
+<p:properties xmlns:p="http://schemas.microsoft.com/office/2006/metadata/properties" xmlns:xsi="http://www.w3.org/2001/XMLSchema-instance" xmlns:pc="http://schemas.microsoft.com/office/infopath/2007/PartnerControls">
+  <documentManagement>
+    <LocPublishedLinkedAssetsLookup xmlns="4873beb7-5857-4685-be1f-d57550cc96cc" xsi:nil="true"/>
+    <ApprovalStatus xmlns="4873beb7-5857-4685-be1f-d57550cc96cc">InProgress</ApprovalStatus>
+    <MarketSpecific xmlns="4873beb7-5857-4685-be1f-d57550cc96cc">false</MarketSpecific>
+    <LocComments xmlns="4873beb7-5857-4685-be1f-d57550cc96cc" xsi:nil="true"/>
+    <LocLastLocAttemptVersionTypeLookup xmlns="4873beb7-5857-4685-be1f-d57550cc96cc" xsi:nil="true"/>
+    <DirectSourceMarket xmlns="4873beb7-5857-4685-be1f-d57550cc96cc" xsi:nil="true"/>
+    <ThumbnailAssetId xmlns="4873beb7-5857-4685-be1f-d57550cc96cc" xsi:nil="true"/>
+    <PrimaryImageGen xmlns="4873beb7-5857-4685-be1f-d57550cc96cc">false</PrimaryImageGen>
+    <LocNewPublishedVersionLookup xmlns="4873beb7-5857-4685-be1f-d57550cc96cc" xsi:nil="true"/>
+    <LegacyData xmlns="4873beb7-5857-4685-be1f-d57550cc96cc" xsi:nil="true"/>
+    <LocRecommendedHandoff xmlns="4873beb7-5857-4685-be1f-d57550cc96cc" xsi:nil="true"/>
+    <BusinessGroup xmlns="4873beb7-5857-4685-be1f-d57550cc96cc" xsi:nil="true"/>
+    <BlockPublish xmlns="4873beb7-5857-4685-be1f-d57550cc96cc">false</BlockPublish>
+    <TPFriendlyName xmlns="4873beb7-5857-4685-be1f-d57550cc96cc" xsi:nil="true"/>
+    <LocOverallPublishStatusLookup xmlns="4873beb7-5857-4685-be1f-d57550cc96cc" xsi:nil="true"/>
+    <NumericId xmlns="4873beb7-5857-4685-be1f-d57550cc96cc" xsi:nil="true"/>
+    <APEditor xmlns="4873beb7-5857-4685-be1f-d57550cc96cc">
+      <UserInfo>
+        <DisplayName/>
+        <AccountId xsi:nil="true"/>
+        <AccountType/>
+      </UserInfo>
+    </APEditor>
+    <SourceTitle xmlns="4873beb7-5857-4685-be1f-d57550cc96cc" xsi:nil="true"/>
+    <OpenTemplate xmlns="4873beb7-5857-4685-be1f-d57550cc96cc">true</OpenTemplate>
+    <LocOverallLocStatusLookup xmlns="4873beb7-5857-4685-be1f-d57550cc96cc" xsi:nil="true"/>
+    <UALocComments xmlns="4873beb7-5857-4685-be1f-d57550cc96cc" xsi:nil="true"/>
+    <ParentAssetId xmlns="4873beb7-5857-4685-be1f-d57550cc96cc" xsi:nil="true"/>
+    <IntlLangReviewDate xmlns="4873beb7-5857-4685-be1f-d57550cc96cc" xsi:nil="true"/>
+    <FeatureTagsTaxHTField0 xmlns="4873beb7-5857-4685-be1f-d57550cc96cc">
+      <Terms xmlns="http://schemas.microsoft.com/office/infopath/2007/PartnerControls"/>
+    </FeatureTagsTaxHTField0>
+    <PublishStatusLookup xmlns="4873beb7-5857-4685-be1f-d57550cc96cc">
+      <Value>1345093</Value>
+    </PublishStatusLookup>
+    <Providers xmlns="4873beb7-5857-4685-be1f-d57550cc96cc" xsi:nil="true"/>
+    <MachineTranslated xmlns="4873beb7-5857-4685-be1f-d57550cc96cc">false</MachineTranslated>
+    <OriginalSourceMarket xmlns="4873beb7-5857-4685-be1f-d57550cc96cc" xsi:nil="true"/>
+    <APDescription xmlns="4873beb7-5857-4685-be1f-d57550cc96cc">This simple template design works for technology and  businesses, but it's versatile enough to use in other contexts.  It features multiple slide layouts designed for widescreen (16x9 resolution) and includes a sample SmartArt list and chart that are easily editable.</APDescription>
+    <ClipArtFilename xmlns="4873beb7-5857-4685-be1f-d57550cc96cc" xsi:nil="true"/>
+    <ContentItem xmlns="4873beb7-5857-4685-be1f-d57550cc96cc" xsi:nil="true"/>
+    <TPInstallLocation xmlns="4873beb7-5857-4685-be1f-d57550cc96cc" xsi:nil="true"/>
+    <PublishTargets xmlns="4873beb7-5857-4685-be1f-d57550cc96cc">OfficeOnlineVNext</PublishTargets>
+    <TimesCloned xmlns="4873beb7-5857-4685-be1f-d57550cc96cc" xsi:nil="true"/>
+    <AssetStart xmlns="4873beb7-5857-4685-be1f-d57550cc96cc">2011-11-26T00:30:00+00:00</AssetStart>
+    <Provider xmlns="4873beb7-5857-4685-be1f-d57550cc96cc" xsi:nil="true"/>
+    <AcquiredFrom xmlns="4873beb7-5857-4685-be1f-d57550cc96cc">Internal MS</AcquiredFrom>
+    <FriendlyTitle xmlns="4873beb7-5857-4685-be1f-d57550cc96cc" xsi:nil="true"/>
+    <LastHandOff xmlns="4873beb7-5857-4685-be1f-d57550cc96cc" xsi:nil="true"/>
+    <TPClientViewer xmlns="4873beb7-5857-4685-be1f-d57550cc96cc" xsi:nil="true"/>
+    <TemplateStatus xmlns="4873beb7-5857-4685-be1f-d57550cc96cc">Complete</TemplateStatus>
+    <Downloads xmlns="4873beb7-5857-4685-be1f-d57550cc96cc">0</Downloads>
+    <OOCacheId xmlns="4873beb7-5857-4685-be1f-d57550cc96cc" xsi:nil="true"/>
+    <IsDeleted xmlns="4873beb7-5857-4685-be1f-d57550cc96cc">false</IsDeleted>
+    <LocPublishedDependentAssetsLookup xmlns="4873beb7-5857-4685-be1f-d57550cc96cc" xsi:nil="true"/>
+    <TPExecutable xmlns="4873beb7-5857-4685-be1f-d57550cc96cc" xsi:nil="true"/>
+    <EditorialTags xmlns="4873beb7-5857-4685-be1f-d57550cc96cc" xsi:nil="true"/>
+    <SubmitterId xmlns="4873beb7-5857-4685-be1f-d57550cc96cc" xsi:nil="true"/>
+    <ApprovalLog xmlns="4873beb7-5857-4685-be1f-d57550cc96cc" xsi:nil="true"/>
+    <AssetType xmlns="4873beb7-5857-4685-be1f-d57550cc96cc">TP</AssetType>
+    <BugNumber xmlns="4873beb7-5857-4685-be1f-d57550cc96cc" xsi:nil="true"/>
+    <CSXSubmissionDate xmlns="4873beb7-5857-4685-be1f-d57550cc96cc" xsi:nil="true"/>
+    <CSXUpdate xmlns="4873beb7-5857-4685-be1f-d57550cc96cc">false</CSXUpdate>
+    <Milestone xmlns="4873beb7-5857-4685-be1f-d57550cc96cc" xsi:nil="true"/>
+    <RecommendationsModifier xmlns="4873beb7-5857-4685-be1f-d57550cc96cc" xsi:nil="true"/>
+    <OriginAsset xmlns="4873beb7-5857-4685-be1f-d57550cc96cc" xsi:nil="true"/>
+    <TPComponent xmlns="4873beb7-5857-4685-be1f-d57550cc96cc" xsi:nil="true"/>
+    <AssetId xmlns="4873beb7-5857-4685-be1f-d57550cc96cc">TP102787989</AssetId>
+    <IntlLocPriority xmlns="4873beb7-5857-4685-be1f-d57550cc96cc" xsi:nil="true"/>
+    <PolicheckWords xmlns="4873beb7-5857-4685-be1f-d57550cc96cc" xsi:nil="true"/>
+    <TPLaunchHelpLink xmlns="4873beb7-5857-4685-be1f-d57550cc96cc" xsi:nil="true"/>
+    <TPApplication xmlns="4873beb7-5857-4685-be1f-d57550cc96cc" xsi:nil="true"/>
+    <CrawlForDependencies xmlns="4873beb7-5857-4685-be1f-d57550cc96cc">false</CrawlForDependencies>
+    <HandoffToMSDN xmlns="4873beb7-5857-4685-be1f-d57550cc96cc" xsi:nil="true"/>
+    <PlannedPubDate xmlns="4873beb7-5857-4685-be1f-d57550cc96cc" xsi:nil="true"/>
+    <IntlLangReviewer xmlns="4873beb7-5857-4685-be1f-d57550cc96cc" xsi:nil="true"/>
+    <TrustLevel xmlns="4873beb7-5857-4685-be1f-d57550cc96cc">1 Microsoft Managed Content</TrustLevel>
+    <LocLastLocAttemptVersionLookup xmlns="4873beb7-5857-4685-be1f-d57550cc96cc">694266</LocLastLocAttemptVersionLookup>
+    <LocProcessedForHandoffsLookup xmlns="4873beb7-5857-4685-be1f-d57550cc96cc" xsi:nil="true"/>
+    <IsSearchable xmlns="4873beb7-5857-4685-be1f-d57550cc96cc">true</IsSearchable>
+    <TemplateTemplateType xmlns="4873beb7-5857-4685-be1f-d57550cc96cc">PowerPoint Presentation Template</TemplateTemplateType>
+    <CampaignTagsTaxHTField0 xmlns="4873beb7-5857-4685-be1f-d57550cc96cc">
+      <Terms xmlns="http://schemas.microsoft.com/office/infopath/2007/PartnerControls"/>
+    </CampaignTagsTaxHTField0>
+    <TPNamespace xmlns="4873beb7-5857-4685-be1f-d57550cc96cc" xsi:nil="true"/>
+    <LocOverallPreviewStatusLookup xmlns="4873beb7-5857-4685-be1f-d57550cc96cc" xsi:nil="true"/>
+    <TaxCatchAll xmlns="4873beb7-5857-4685-be1f-d57550cc96cc"/>
+    <Markets xmlns="4873beb7-5857-4685-be1f-d57550cc96cc"/>
+    <UAProjectedTotalWords xmlns="4873beb7-5857-4685-be1f-d57550cc96cc" xsi:nil="true"/>
+    <IntlLangReview xmlns="4873beb7-5857-4685-be1f-d57550cc96cc" xsi:nil="true"/>
+    <OutputCachingOn xmlns="4873beb7-5857-4685-be1f-d57550cc96cc">false</OutputCachingOn>
+    <AverageRating xmlns="4873beb7-5857-4685-be1f-d57550cc96cc" xsi:nil="true"/>
+    <APAuthor xmlns="4873beb7-5857-4685-be1f-d57550cc96cc">
+      <UserInfo>
+        <DisplayName>REDMOND\kristaa</DisplayName>
+        <AccountId>136</AccountId>
+        <AccountType/>
+      </UserInfo>
+    </APAuthor>
+    <LocManualTestRequired xmlns="4873beb7-5857-4685-be1f-d57550cc96cc">false</LocManualTestRequired>
+    <TPCommandLine xmlns="4873beb7-5857-4685-be1f-d57550cc96cc" xsi:nil="true"/>
+    <TPAppVersion xmlns="4873beb7-5857-4685-be1f-d57550cc96cc" xsi:nil="true"/>
+    <EditorialStatus xmlns="4873beb7-5857-4685-be1f-d57550cc96cc">Complete</EditorialStatus>
+    <LastModifiedDateTime xmlns="4873beb7-5857-4685-be1f-d57550cc96cc" xsi:nil="true"/>
+    <ScenarioTagsTaxHTField0 xmlns="4873beb7-5857-4685-be1f-d57550cc96cc">
+      <Terms xmlns="http://schemas.microsoft.com/office/infopath/2007/PartnerControls"/>
+    </ScenarioTagsTaxHTField0>
+    <LocProcessedForMarketsLookup xmlns="4873beb7-5857-4685-be1f-d57550cc96cc" xsi:nil="true"/>
+    <TPLaunchHelpLinkType xmlns="4873beb7-5857-4685-be1f-d57550cc96cc">Template</TPLaunchHelpLinkType>
+    <OriginalRelease xmlns="4873beb7-5857-4685-be1f-d57550cc96cc">15</OriginalRelease>
+    <LocalizationTagsTaxHTField0 xmlns="4873beb7-5857-4685-be1f-d57550cc96cc">
+      <Terms xmlns="http://schemas.microsoft.com/office/infopath/2007/PartnerControls"/>
+    </LocalizationTagsTaxHTField0>
+    <UACurrentWords xmlns="4873beb7-5857-4685-be1f-d57550cc96cc" xsi:nil="true"/>
+    <ArtSampleDocs xmlns="4873beb7-5857-4685-be1f-d57550cc96cc" xsi:nil="true"/>
+    <UALocRecommendation xmlns="4873beb7-5857-4685-be1f-d57550cc96cc">Localize</UALocRecommendation>
+    <Manager xmlns="4873beb7-5857-4685-be1f-d57550cc96cc" xsi:nil="true"/>
+    <LocOverallHandbackStatusLookup xmlns="4873beb7-5857-4685-be1f-d57550cc96cc" xsi:nil="true"/>
+    <ShowIn xmlns="4873beb7-5857-4685-be1f-d57550cc96cc">Show everywhere</ShowIn>
+    <UANotes xmlns="4873beb7-5857-4685-be1f-d57550cc96cc" xsi:nil="true"/>
+    <InternalTagsTaxHTField0 xmlns="4873beb7-5857-4685-be1f-d57550cc96cc">
+      <Terms xmlns="http://schemas.microsoft.com/office/infopath/2007/PartnerControls"/>
+    </InternalTagsTaxHTField0>
+    <CSXHash xmlns="4873beb7-5857-4685-be1f-d57550cc96cc" xsi:nil="true"/>
+    <VoteCount xmlns="4873beb7-5857-4685-be1f-d57550cc96cc" xsi:nil="true"/>
+    <AssetExpire xmlns="4873beb7-5857-4685-be1f-d57550cc96cc">2029-05-12T07:00:00+00:00</AssetExpire>
+    <DSATActionTaken xmlns="4873beb7-5857-4685-be1f-d57550cc96cc" xsi:nil="true"/>
+    <CSXSubmissionMarket xmlns="4873beb7-5857-4685-be1f-d57550cc96cc" xsi:nil="true"/>
+    <LocMarketGroupTiers2 xmlns="4873beb7-5857-4685-be1f-d57550cc96cc" xsi:nil="true"/>
+  </documentManagement>
+</p:properties>
 </file>
 
-<file path=customXml/itemProps3.xml><?xml version="1.0" encoding="utf-8"?>
+<file path=customXml/itemProps1.xml><?xml version="1.0" encoding="utf-8"?>
 <ds:datastoreItem xmlns:ds="http://schemas.openxmlformats.org/officeDocument/2006/customXml" ds:itemID="{A09BF4D4-EF60-4196-BFC3-9462D607978C}">
   <ds:schemaRefs>
     <ds:schemaRef ds:uri="http://schemas.microsoft.com/office/2006/metadata/contentType"/>
@@ -16152,4 +16162,28 @@
     <ds:schemaRef ds:uri="http://schemas.microsoft.com/internal/obd"/>
   </ds:schemaRefs>
 </ds:datastoreItem>
+</file>
+
+<file path=customXml/itemProps2.xml><?xml version="1.0" encoding="utf-8"?>
+<ds:datastoreItem xmlns:ds="http://schemas.openxmlformats.org/officeDocument/2006/customXml" ds:itemID="{3836F65B-1B07-41EE-A0E8-BC6EF3855225}">
+  <ds:schemaRefs>
+    <ds:schemaRef ds:uri="http://schemas.microsoft.com/sharepoint/v3/contenttype/forms"/>
+  </ds:schemaRefs>
+</ds:datastoreItem>
+</file>
+
+<file path=customXml/itemProps3.xml><?xml version="1.0" encoding="utf-8"?>
+<ds:datastoreItem xmlns:ds="http://schemas.openxmlformats.org/officeDocument/2006/customXml" ds:itemID="{60C67BEE-D13F-4BD2-98A5-34D8A0977F68}">
+  <ds:schemaRefs>
+    <ds:schemaRef ds:uri="4873beb7-5857-4685-be1f-d57550cc96cc"/>
+    <ds:schemaRef ds:uri="http://schemas.microsoft.com/office/2006/documentManagement/types"/>
+    <ds:schemaRef ds:uri="http://schemas.openxmlformats.org/package/2006/metadata/core-properties"/>
+    <ds:schemaRef ds:uri="http://purl.org/dc/elements/1.1/"/>
+    <ds:schemaRef ds:uri="http://purl.org/dc/dcmitype/"/>
+    <ds:schemaRef ds:uri="http://schemas.microsoft.com/office/2006/metadata/properties"/>
+    <ds:schemaRef ds:uri="http://schemas.microsoft.com/office/infopath/2007/PartnerControls"/>
+    <ds:schemaRef ds:uri="http://www.w3.org/XML/1998/namespace"/>
+    <ds:schemaRef ds:uri="http://purl.org/dc/terms/"/>
+  </ds:schemaRefs>
+</ds:datastoreItem>
 </file>